--- a/theory_11-usability_evaluation/theory_11-usability_evaluation.pptx
+++ b/theory_11-usability_evaluation/theory_11-usability_evaluation.pptx
@@ -234,7 +234,7 @@
           <a:p>
             <a:fld id="{251090E0-FB0C-49E9-9864-9F53EABEA96F}" type="datetimeFigureOut">
               <a:rPr lang="en-GB" smtClean="0"/>
-              <a:t>19/06/2024</a:t>
+              <a:t>05/05/2025</a:t>
             </a:fld>
             <a:endParaRPr lang="en-GB"/>
           </a:p>
@@ -1200,7 +1200,9 @@
           <a:lstStyle>
             <a:lvl1pPr marL="0" indent="0" algn="ctr">
               <a:buNone/>
-              <a:defRPr sz="4800" b="1"/>
+              <a:defRPr sz="4800" b="1">
+                <a:latin typeface="Aptos" panose="020B0004020202020204" pitchFamily="34" charset="0"/>
+              </a:defRPr>
             </a:lvl1pPr>
             <a:lvl2pPr marL="457200" indent="0" algn="ctr">
               <a:buNone/>
@@ -1286,7 +1288,9 @@
           <a:lstStyle/>
           <a:p>
             <a:pPr algn="ctr"/>
-            <a:endParaRPr lang="en-GB" dirty="0"/>
+            <a:endParaRPr lang="en-GB" dirty="0">
+              <a:latin typeface="Aptos" panose="020B0004020202020204" pitchFamily="34" charset="0"/>
+            </a:endParaRPr>
           </a:p>
         </p:txBody>
       </p:sp>
@@ -1336,7 +1340,9 @@
           <a:lstStyle/>
           <a:p>
             <a:pPr algn="ctr"/>
-            <a:endParaRPr lang="en-GB" dirty="0"/>
+            <a:endParaRPr lang="en-GB" dirty="0">
+              <a:latin typeface="Aptos" panose="020B0004020202020204" pitchFamily="34" charset="0"/>
+            </a:endParaRPr>
           </a:p>
         </p:txBody>
       </p:sp>
@@ -1382,36 +1388,52 @@
           </a:lstStyle>
           <a:p>
             <a:r>
-              <a:rPr lang="it-IT" sz="2800" b="0" dirty="0" err="1"/>
+              <a:rPr lang="it-IT" sz="2800" b="0" dirty="0" err="1">
+                <a:latin typeface="Aptos" panose="020B0004020202020204" pitchFamily="34" charset="0"/>
+              </a:rPr>
               <a:t>Biomedical</a:t>
             </a:r>
             <a:r>
-              <a:rPr lang="it-IT" sz="2800" b="0" dirty="0"/>
+              <a:rPr lang="it-IT" sz="2800" b="0" dirty="0">
+                <a:latin typeface="Aptos" panose="020B0004020202020204" pitchFamily="34" charset="0"/>
+              </a:rPr>
               <a:t> </a:t>
             </a:r>
             <a:r>
-              <a:rPr lang="it-IT" sz="2800" b="0" dirty="0" err="1"/>
+              <a:rPr lang="it-IT" sz="2800" b="0" dirty="0" err="1">
+                <a:latin typeface="Aptos" panose="020B0004020202020204" pitchFamily="34" charset="0"/>
+              </a:rPr>
               <a:t>Wearable</a:t>
             </a:r>
             <a:r>
-              <a:rPr lang="it-IT" sz="2800" b="0" dirty="0"/>
+              <a:rPr lang="it-IT" sz="2800" b="0" dirty="0">
+                <a:latin typeface="Aptos" panose="020B0004020202020204" pitchFamily="34" charset="0"/>
+              </a:rPr>
               <a:t> Technologies </a:t>
             </a:r>
           </a:p>
           <a:p>
             <a:r>
-              <a:rPr lang="it-IT" sz="2800" b="0" dirty="0"/>
+              <a:rPr lang="it-IT" sz="2800" b="0" dirty="0">
+                <a:latin typeface="Aptos" panose="020B0004020202020204" pitchFamily="34" charset="0"/>
+              </a:rPr>
               <a:t>for Healthcare and </a:t>
             </a:r>
             <a:r>
-              <a:rPr lang="it-IT" sz="2800" b="0" dirty="0" err="1"/>
+              <a:rPr lang="it-IT" sz="2800" b="0" dirty="0" err="1">
+                <a:latin typeface="Aptos" panose="020B0004020202020204" pitchFamily="34" charset="0"/>
+              </a:rPr>
               <a:t>Wellbeing</a:t>
             </a:r>
             <a:r>
-              <a:rPr lang="it-IT" sz="2800" b="0" dirty="0"/>
+              <a:rPr lang="it-IT" sz="2800" b="0" dirty="0">
+                <a:latin typeface="Aptos" panose="020B0004020202020204" pitchFamily="34" charset="0"/>
+              </a:rPr>
               <a:t>  </a:t>
             </a:r>
-            <a:endParaRPr lang="en-GB" sz="2800" b="0" dirty="0"/>
+            <a:endParaRPr lang="en-GB" sz="2800" b="0" dirty="0">
+              <a:latin typeface="Aptos" panose="020B0004020202020204" pitchFamily="34" charset="0"/>
+            </a:endParaRPr>
           </a:p>
         </p:txBody>
       </p:sp>
@@ -1462,8 +1484,10 @@
               </a:spcAft>
             </a:pPr>
             <a:r>
-              <a:rPr lang="it-IT" sz="2800" dirty="0"/>
-              <a:t>A.Y. 2023-2024</a:t>
+              <a:rPr lang="it-IT" sz="2800" dirty="0">
+                <a:latin typeface="Aptos" panose="020B0004020202020204" pitchFamily="34" charset="0"/>
+              </a:rPr>
+              <a:t>A.Y. 2024-2025</a:t>
             </a:r>
           </a:p>
           <a:p>
@@ -1473,7 +1497,9 @@
               </a:spcAft>
             </a:pPr>
             <a:r>
-              <a:rPr lang="it-IT" sz="2800" dirty="0"/>
+              <a:rPr lang="it-IT" sz="2800" dirty="0">
+                <a:latin typeface="Aptos" panose="020B0004020202020204" pitchFamily="34" charset="0"/>
+              </a:rPr>
               <a:t>Giacomo Cappon</a:t>
             </a:r>
           </a:p>
@@ -1513,7 +1539,7 @@
                 <a:effectLst/>
                 <a:uLnTx/>
                 <a:uFillTx/>
-                <a:latin typeface="Palatino Linotype" panose="02040502050505030304" pitchFamily="18" charset="0"/>
+                <a:latin typeface="Aptos" panose="020B0004020202020204" pitchFamily="34" charset="0"/>
                 <a:ea typeface="+mj-ea"/>
                 <a:cs typeface="+mj-cs"/>
               </a:rPr>
@@ -1530,7 +1556,7 @@
                 <a:effectLst/>
                 <a:uLnTx/>
                 <a:uFillTx/>
-                <a:latin typeface="Palatino Linotype" panose="02040502050505030304" pitchFamily="18" charset="0"/>
+                <a:latin typeface="Aptos" panose="020B0004020202020204" pitchFamily="34" charset="0"/>
                 <a:ea typeface="+mj-ea"/>
                 <a:cs typeface="+mj-cs"/>
               </a:rPr>
@@ -1547,7 +1573,7 @@
                 <a:effectLst/>
                 <a:uLnTx/>
                 <a:uFillTx/>
-                <a:latin typeface="Palatino Linotype" panose="02040502050505030304" pitchFamily="18" charset="0"/>
+                <a:latin typeface="Aptos" panose="020B0004020202020204" pitchFamily="34" charset="0"/>
                 <a:ea typeface="+mj-ea"/>
                 <a:cs typeface="+mj-cs"/>
               </a:rPr>
@@ -1563,7 +1589,7 @@
                 <a:effectLst/>
                 <a:uLnTx/>
                 <a:uFillTx/>
-                <a:latin typeface="Palatino Linotype" panose="02040502050505030304" pitchFamily="18" charset="0"/>
+                <a:latin typeface="Aptos" panose="020B0004020202020204" pitchFamily="34" charset="0"/>
                 <a:ea typeface="+mj-ea"/>
                 <a:cs typeface="+mj-cs"/>
               </a:rPr>
@@ -1580,7 +1606,7 @@
                 <a:effectLst/>
                 <a:uLnTx/>
                 <a:uFillTx/>
-                <a:latin typeface="Palatino Linotype" panose="02040502050505030304" pitchFamily="18" charset="0"/>
+                <a:latin typeface="Aptos" panose="020B0004020202020204" pitchFamily="34" charset="0"/>
                 <a:ea typeface="+mj-ea"/>
                 <a:cs typeface="+mj-cs"/>
               </a:rPr>
@@ -1597,13 +1623,15 @@
                 <a:effectLst/>
                 <a:uLnTx/>
                 <a:uFillTx/>
-                <a:latin typeface="Palatino Linotype" panose="02040502050505030304" pitchFamily="18" charset="0"/>
+                <a:latin typeface="Aptos" panose="020B0004020202020204" pitchFamily="34" charset="0"/>
                 <a:ea typeface="+mj-ea"/>
                 <a:cs typeface="+mj-cs"/>
               </a:rPr>
               <a:t>Engineering</a:t>
             </a:r>
-            <a:endParaRPr lang="en-GB" sz="1100" cap="small" baseline="0" dirty="0"/>
+            <a:endParaRPr lang="en-GB" sz="1100" cap="small" baseline="0" dirty="0">
+              <a:latin typeface="Aptos" panose="020B0004020202020204" pitchFamily="34" charset="0"/>
+            </a:endParaRPr>
           </a:p>
         </p:txBody>
       </p:sp>
@@ -2074,12 +2102,14 @@
                     <a:tint val="75000"/>
                   </a:schemeClr>
                 </a:solidFill>
+                <a:latin typeface="Aptos" panose="020B0004020202020204" pitchFamily="34" charset="0"/>
               </a:defRPr>
             </a:lvl1pPr>
           </a:lstStyle>
           <a:p>
             <a:fld id="{31DE2C5B-556E-47B8-A792-024C2FCA4ACC}" type="slidenum">
               <a:rPr lang="en-GB" smtClean="0"/>
+              <a:pPr/>
               <a:t>‹#›</a:t>
             </a:fld>
             <a:endParaRPr lang="en-GB"/>
@@ -2115,7 +2145,7 @@
           <a:solidFill>
             <a:schemeClr val="tx1"/>
           </a:solidFill>
-          <a:latin typeface="Palatino Linotype" panose="02040502050505030304" pitchFamily="18" charset="0"/>
+          <a:latin typeface="Aptos" panose="020B0004020202020204" pitchFamily="34" charset="0"/>
           <a:ea typeface="+mj-ea"/>
           <a:cs typeface="+mj-cs"/>
         </a:defRPr>
@@ -2138,7 +2168,7 @@
           <a:solidFill>
             <a:schemeClr val="tx1"/>
           </a:solidFill>
-          <a:latin typeface="Palatino Linotype" panose="02040502050505030304" pitchFamily="18" charset="0"/>
+          <a:latin typeface="Aptos" panose="020B0004020202020204" pitchFamily="34" charset="0"/>
           <a:ea typeface="+mn-ea"/>
           <a:cs typeface="+mn-cs"/>
         </a:defRPr>
@@ -2159,7 +2189,7 @@
           <a:solidFill>
             <a:schemeClr val="tx1"/>
           </a:solidFill>
-          <a:latin typeface="Palatino Linotype" panose="02040502050505030304" pitchFamily="18" charset="0"/>
+          <a:latin typeface="Aptos" panose="020B0004020202020204" pitchFamily="34" charset="0"/>
           <a:ea typeface="+mn-ea"/>
           <a:cs typeface="+mn-cs"/>
         </a:defRPr>
@@ -2180,7 +2210,7 @@
           <a:solidFill>
             <a:schemeClr val="tx1"/>
           </a:solidFill>
-          <a:latin typeface="Palatino Linotype" panose="02040502050505030304" pitchFamily="18" charset="0"/>
+          <a:latin typeface="Aptos" panose="020B0004020202020204" pitchFamily="34" charset="0"/>
           <a:ea typeface="+mn-ea"/>
           <a:cs typeface="+mn-cs"/>
         </a:defRPr>
@@ -2201,7 +2231,7 @@
           <a:solidFill>
             <a:schemeClr val="tx1"/>
           </a:solidFill>
-          <a:latin typeface="Palatino Linotype" panose="02040502050505030304" pitchFamily="18" charset="0"/>
+          <a:latin typeface="Aptos" panose="020B0004020202020204" pitchFamily="34" charset="0"/>
           <a:ea typeface="+mn-ea"/>
           <a:cs typeface="+mn-cs"/>
         </a:defRPr>
@@ -2222,7 +2252,7 @@
           <a:solidFill>
             <a:schemeClr val="tx1"/>
           </a:solidFill>
-          <a:latin typeface="Palatino Linotype" panose="02040502050505030304" pitchFamily="18" charset="0"/>
+          <a:latin typeface="Aptos" panose="020B0004020202020204" pitchFamily="34" charset="0"/>
           <a:ea typeface="+mn-ea"/>
           <a:cs typeface="+mn-cs"/>
         </a:defRPr>
@@ -4048,7 +4078,7 @@
         </p:spPr>
         <p:txBody>
           <a:bodyPr>
-            <a:normAutofit fontScale="85000" lnSpcReduction="20000"/>
+            <a:normAutofit fontScale="85000" lnSpcReduction="10000"/>
           </a:bodyPr>
           <a:lstStyle/>
           <a:p>
@@ -7370,7 +7400,7 @@
             <a:pPr algn="ctr"/>
             <a:r>
               <a:rPr lang="en-US" b="1" dirty="0">
-                <a:latin typeface="Palatino" pitchFamily="2" charset="77"/>
+                <a:latin typeface="Aptos" panose="020B0004020202020204" pitchFamily="34" charset="0"/>
                 <a:ea typeface="Palatino" pitchFamily="2" charset="77"/>
               </a:rPr>
               <a:t>BONUS</a:t>
@@ -7576,7 +7606,7 @@
             <a:pPr algn="ctr"/>
             <a:r>
               <a:rPr lang="en-US" b="1" dirty="0">
-                <a:latin typeface="Palatino" pitchFamily="2" charset="77"/>
+                <a:latin typeface="Aptos" panose="020B0004020202020204" pitchFamily="34" charset="0"/>
                 <a:ea typeface="Palatino" pitchFamily="2" charset="77"/>
               </a:rPr>
               <a:t>BONUS</a:t>
@@ -9146,8 +9176,8 @@
           </a:p>
         </p:txBody>
       </p:sp>
-      <mc:AlternateContent xmlns:mc="http://schemas.openxmlformats.org/markup-compatibility/2006" xmlns:a14="http://schemas.microsoft.com/office/drawing/2010/main">
-        <mc:Choice Requires="a14">
+      <mc:AlternateContent xmlns:mc="http://schemas.openxmlformats.org/markup-compatibility/2006">
+        <mc:Choice xmlns:a14="http://schemas.microsoft.com/office/drawing/2010/main" Requires="a14">
           <p:sp>
             <p:nvSpPr>
               <p:cNvPr id="3" name="Segnaposto contenuto 2">
@@ -9230,12 +9260,16 @@
                   </m:oMath>
                 </a14:m>
                 <a:r>
+                  <a:rPr lang="en-GB" i="1" dirty="0"/>
+                  <a:t>, </a:t>
+                </a:r>
+                <a:r>
                   <a:rPr lang="en-GB" dirty="0"/>
-                  <a:t> and </a:t>
+                  <a:t>while</a:t>
                 </a:r>
                 <a:r>
                   <a:rPr lang="en-GB" i="1" dirty="0"/>
-                  <a:t>n </a:t>
+                  <a:t> n </a:t>
                 </a:r>
                 <a:r>
                   <a:rPr lang="en-GB" dirty="0"/>
@@ -9257,7 +9291,7 @@
             </p:txBody>
           </p:sp>
         </mc:Choice>
-        <mc:Fallback xmlns="">
+        <mc:Fallback>
           <p:sp>
             <p:nvSpPr>
               <p:cNvPr id="3" name="Segnaposto contenuto 2">
@@ -9511,8 +9545,8 @@
           </p:sp>
         </mc:Fallback>
       </mc:AlternateContent>
-      <mc:AlternateContent xmlns:mc="http://schemas.openxmlformats.org/markup-compatibility/2006" xmlns:a14="http://schemas.microsoft.com/office/drawing/2010/main">
-        <mc:Choice Requires="a14">
+      <mc:AlternateContent xmlns:mc="http://schemas.openxmlformats.org/markup-compatibility/2006">
+        <mc:Choice xmlns:a14="http://schemas.microsoft.com/office/drawing/2010/main" Requires="a14">
           <p:sp>
             <p:nvSpPr>
               <p:cNvPr id="8" name="Segnaposto contenuto 2">
@@ -9747,8 +9781,14 @@
                   <a:t> </a:t>
                 </a:r>
                 <a:r>
+                  <a:rPr lang="en-US" dirty="0">
+                    <a:latin typeface="Aptos" panose="020B0004020202020204" pitchFamily="34" charset="0"/>
+                  </a:rPr>
+                  <a:t>is the sample mean</a:t>
+                </a:r>
+                <a:r>
                   <a:rPr lang="en-US" dirty="0"/>
-                  <a:t>is the sample mean,</a:t>
+                  <a:t>,</a:t>
                 </a:r>
               </a:p>
               <a:p>
@@ -9757,8 +9797,14 @@
                   <a:t>n </a:t>
                 </a:r>
                 <a:r>
+                  <a:rPr lang="en-US" dirty="0">
+                    <a:latin typeface="Aptos" panose="020B0004020202020204" pitchFamily="34" charset="0"/>
+                  </a:rPr>
+                  <a:t>is the sample size</a:t>
+                </a:r>
+                <a:r>
                   <a:rPr lang="en-US" dirty="0"/>
-                  <a:t>is the sample size,</a:t>
+                  <a:t>,</a:t>
                 </a:r>
               </a:p>
               <a:p>
@@ -9767,9 +9813,12 @@
                   <a:t>s </a:t>
                 </a:r>
                 <a:r>
-                  <a:rPr lang="en-US" dirty="0"/>
+                  <a:rPr lang="en-US" dirty="0">
+                    <a:latin typeface="Aptos" panose="020B0004020202020204" pitchFamily="34" charset="0"/>
+                  </a:rPr>
                   <a:t>is the sample standard deviation, and</a:t>
                 </a:r>
+                <a:endParaRPr lang="en-US" dirty="0"/>
               </a:p>
               <a:p>
                 <a14:m>
@@ -9841,16 +9890,20 @@
                   </m:oMath>
                 </a14:m>
                 <a:r>
-                  <a:rPr lang="en-US" dirty="0"/>
-                  <a:t>is the critical value from the </a:t>
-                </a:r>
-                <a:r>
-                  <a:rPr lang="en-US" i="1" dirty="0"/>
-                  <a:t>t</a:t>
+                  <a:rPr lang="en-US" dirty="0">
+                    <a:latin typeface="Aptos" panose="020B0004020202020204" pitchFamily="34" charset="0"/>
+                  </a:rPr>
+                  <a:t>is the critical value from the</a:t>
                 </a:r>
                 <a:r>
                   <a:rPr lang="en-US" dirty="0"/>
-                  <a:t>-distribution for </a:t>
+                  <a:t> </a:t>
+                </a:r>
+                <a:r>
+                  <a:rPr lang="en-US" dirty="0">
+                    <a:latin typeface="Aptos" panose="020B0004020202020204" pitchFamily="34" charset="0"/>
+                  </a:rPr>
+                  <a:t>t-distribution for </a:t>
                 </a:r>
                 <a:r>
                   <a:rPr lang="en-US" i="1" dirty="0"/>
@@ -9858,7 +9911,13 @@
                 </a:r>
                 <a:r>
                   <a:rPr lang="en-US" dirty="0"/>
-                  <a:t>−1 degrees of freedom and the specified confidence level </a:t>
+                  <a:t>−1 </a:t>
+                </a:r>
+                <a:r>
+                  <a:rPr lang="en-US" dirty="0">
+                    <a:latin typeface="Aptos" panose="020B0004020202020204" pitchFamily="34" charset="0"/>
+                  </a:rPr>
+                  <a:t>degrees of freedom and the specified confidence level </a:t>
                 </a:r>
                 <a14:m>
                   <m:oMath xmlns:m="http://schemas.openxmlformats.org/officeDocument/2006/math">
@@ -9893,14 +9952,19 @@
                   <a:rPr lang="en-GB" dirty="0">
                     <a:latin typeface="Palatino Linotype" panose="02040502050505030304" pitchFamily="18" charset="0"/>
                   </a:rPr>
-                  <a:t> is called level of significance</a:t>
+                  <a:t> </a:t>
                 </a:r>
-                <a:endParaRPr lang="en-GB" dirty="0"/>
+                <a:r>
+                  <a:rPr lang="en-GB" dirty="0">
+                    <a:latin typeface="Aptos" panose="020B0004020202020204" pitchFamily="34" charset="0"/>
+                  </a:rPr>
+                  <a:t>is called level of significance</a:t>
+                </a:r>
               </a:p>
             </p:txBody>
           </p:sp>
         </mc:Choice>
-        <mc:Fallback xmlns="">
+        <mc:Fallback>
           <p:sp>
             <p:nvSpPr>
               <p:cNvPr id="8" name="Segnaposto contenuto 2">
@@ -12289,7 +12353,7 @@
         </p:nvSpPr>
         <p:spPr>
           <a:xfrm>
-            <a:off x="259227" y="6231882"/>
+            <a:off x="259226" y="6214900"/>
             <a:ext cx="9996122" cy="400110"/>
           </a:xfrm>
           <a:prstGeom prst="rect">
@@ -12308,9 +12372,9 @@
             </a:pPr>
             <a:r>
               <a:rPr lang="en-GB" sz="2000" dirty="0">
-                <a:latin typeface="Palatino Linotype" panose="02040502050505030304" pitchFamily="18" charset="0"/>
+                <a:latin typeface="Aptos" panose="020B0004020202020204" pitchFamily="34" charset="0"/>
               </a:rPr>
-              <a:t>This reads that we can be 95% confident that the true score is between 81.66 and 95.54</a:t>
+              <a:t>This reads “we can be 95% confident that the true score is between 81.66 and 95.54”</a:t>
             </a:r>
           </a:p>
         </p:txBody>
@@ -12938,8 +13002,8 @@
           </p:sp>
         </mc:Fallback>
       </mc:AlternateContent>
-      <mc:AlternateContent xmlns:mc="http://schemas.openxmlformats.org/markup-compatibility/2006" xmlns:a14="http://schemas.microsoft.com/office/drawing/2010/main">
-        <mc:Choice Requires="a14">
+      <mc:AlternateContent xmlns:mc="http://schemas.openxmlformats.org/markup-compatibility/2006">
+        <mc:Choice xmlns:a14="http://schemas.microsoft.com/office/drawing/2010/main" Requires="a14">
           <p:sp>
             <p:nvSpPr>
               <p:cNvPr id="6" name="Segnaposto contenuto 2">
@@ -13176,9 +13240,12 @@
                   </m:oMath>
                 </a14:m>
                 <a:r>
-                  <a:rPr lang="en-GB" sz="2000" dirty="0"/>
+                  <a:rPr lang="en-GB" sz="2000" dirty="0">
+                    <a:latin typeface="Aptos" panose="020B0004020202020204" pitchFamily="34" charset="0"/>
+                  </a:rPr>
                   <a:t>is the mean of the difference scores,</a:t>
                 </a:r>
+                <a:endParaRPr lang="en-GB" sz="2000" dirty="0"/>
               </a:p>
               <a:p>
                 <a:r>
@@ -13191,8 +13258,15 @@
                 </a:r>
                 <a:r>
                   <a:rPr lang="en-GB" sz="2000" dirty="0"/>
-                  <a:t> is the standard deviation of the difference scores,</a:t>
+                  <a:t> </a:t>
                 </a:r>
+                <a:r>
+                  <a:rPr lang="en-GB" sz="2000" dirty="0">
+                    <a:latin typeface="Aptos" panose="020B0004020202020204" pitchFamily="34" charset="0"/>
+                  </a:rPr>
+                  <a:t>is the standard deviation of the difference scores,</a:t>
+                </a:r>
+                <a:endParaRPr lang="en-GB" sz="2000" dirty="0"/>
               </a:p>
               <a:p>
                 <a:r>
@@ -13201,7 +13275,13 @@
                 </a:r>
                 <a:r>
                   <a:rPr lang="en-GB" sz="2000" dirty="0"/>
-                  <a:t> is the sample size (the total number of users)</a:t>
+                  <a:t> </a:t>
+                </a:r>
+                <a:r>
+                  <a:rPr lang="en-GB" sz="2000" dirty="0">
+                    <a:latin typeface="Aptos" panose="020B0004020202020204" pitchFamily="34" charset="0"/>
+                  </a:rPr>
+                  <a:t>is the sample size (the total number of users),</a:t>
                 </a:r>
               </a:p>
               <a:p>
@@ -13211,13 +13291,19 @@
                 </a:r>
                 <a:r>
                   <a:rPr lang="en-GB" sz="2000" dirty="0"/>
-                  <a:t> is the test statistic (look-up using the t-distribution based on the sample size).</a:t>
+                  <a:t> </a:t>
+                </a:r>
+                <a:r>
+                  <a:rPr lang="en-GB" sz="2000" dirty="0">
+                    <a:latin typeface="Aptos" panose="020B0004020202020204" pitchFamily="34" charset="0"/>
+                  </a:rPr>
+                  <a:t>is the test statistic (look-up using the t-distribution based on the sample size).</a:t>
                 </a:r>
               </a:p>
             </p:txBody>
           </p:sp>
         </mc:Choice>
-        <mc:Fallback xmlns="">
+        <mc:Fallback>
           <p:sp>
             <p:nvSpPr>
               <p:cNvPr id="6" name="Segnaposto contenuto 2">
@@ -13463,12 +13549,9 @@
           </a:p>
           <a:p>
             <a:r>
-              <a:rPr lang="en-GB" dirty="0">
-                <a:latin typeface="Palatino Linotype" panose="02040502050505030304" pitchFamily="18" charset="0"/>
-              </a:rPr>
+              <a:rPr lang="en-GB" dirty="0"/>
               <a:t>This means that the usability of the two apps are: statistically different if we consider a level of significance greater than ~ 0.05</a:t>
             </a:r>
-            <a:endParaRPr lang="en-GB" dirty="0"/>
           </a:p>
           <a:p>
             <a:pPr marL="0" indent="0">
@@ -14410,8 +14493,8 @@
           </p:sp>
         </mc:Fallback>
       </mc:AlternateContent>
-      <mc:AlternateContent xmlns:mc="http://schemas.openxmlformats.org/markup-compatibility/2006" xmlns:a14="http://schemas.microsoft.com/office/drawing/2010/main">
-        <mc:Choice Requires="a14">
+      <mc:AlternateContent xmlns:mc="http://schemas.openxmlformats.org/markup-compatibility/2006">
+        <mc:Choice xmlns:a14="http://schemas.microsoft.com/office/drawing/2010/main" Requires="a14">
           <p:sp>
             <p:nvSpPr>
               <p:cNvPr id="6" name="Segnaposto contenuto 2">
@@ -14437,7 +14520,7 @@
             </p:spPr>
             <p:txBody>
               <a:bodyPr vert="horz" lIns="91440" tIns="45720" rIns="91440" bIns="45720" rtlCol="0">
-                <a:normAutofit fontScale="92500" lnSpcReduction="20000"/>
+                <a:normAutofit fontScale="92500"/>
               </a:bodyPr>
               <a:lstStyle>
                 <a:lvl1pPr marL="342900" indent="-342900" algn="l" defTabSz="914400" rtl="0" eaLnBrk="1" latinLnBrk="0" hangingPunct="1">
@@ -14667,8 +14750,14 @@
                   </m:oMath>
                 </a14:m>
                 <a:r>
+                  <a:rPr lang="en-GB" sz="2000" dirty="0">
+                    <a:latin typeface="Aptos" panose="020B0004020202020204" pitchFamily="34" charset="0"/>
+                  </a:rPr>
+                  <a:t>and</a:t>
+                </a:r>
+                <a:r>
                   <a:rPr lang="en-GB" sz="2000" dirty="0"/>
-                  <a:t>and </a:t>
+                  <a:t> </a:t>
                 </a:r>
                 <a14:m>
                   <m:oMath xmlns:m="http://schemas.openxmlformats.org/officeDocument/2006/math">
@@ -14718,7 +14807,9 @@
                   </m:oMath>
                 </a14:m>
                 <a:r>
-                  <a:rPr lang="en-GB" sz="2000" dirty="0"/>
+                  <a:rPr lang="en-GB" sz="2100" dirty="0">
+                    <a:latin typeface="Aptos" panose="020B0004020202020204" pitchFamily="34" charset="0"/>
+                  </a:rPr>
                   <a:t>are means from samples 1 and 2</a:t>
                 </a:r>
               </a:p>
@@ -14733,7 +14824,17 @@
                 </a:r>
                 <a:r>
                   <a:rPr lang="en-GB" sz="2000" dirty="0"/>
-                  <a:t> and </a:t>
+                  <a:t> </a:t>
+                </a:r>
+                <a:r>
+                  <a:rPr lang="en-GB" sz="2100" dirty="0">
+                    <a:latin typeface="Aptos" panose="020B0004020202020204" pitchFamily="34" charset="0"/>
+                  </a:rPr>
+                  <a:t>and</a:t>
+                </a:r>
+                <a:r>
+                  <a:rPr lang="en-GB" sz="2000" dirty="0"/>
+                  <a:t> </a:t>
                 </a:r>
                 <a:r>
                   <a:rPr lang="en-GB" sz="2000" i="1" dirty="0"/>
@@ -14745,7 +14846,13 @@
                 </a:r>
                 <a:r>
                   <a:rPr lang="en-GB" sz="2000" dirty="0"/>
-                  <a:t> are standard deviations from samples 1 and 2</a:t>
+                  <a:t> </a:t>
+                </a:r>
+                <a:r>
+                  <a:rPr lang="en-GB" sz="2100" dirty="0">
+                    <a:latin typeface="Aptos" panose="020B0004020202020204" pitchFamily="34" charset="0"/>
+                  </a:rPr>
+                  <a:t>are standard deviations from samples 1 and 2</a:t>
                 </a:r>
               </a:p>
               <a:p>
@@ -14759,7 +14866,17 @@
                 </a:r>
                 <a:r>
                   <a:rPr lang="en-GB" sz="2000" dirty="0"/>
-                  <a:t> and </a:t>
+                  <a:t> </a:t>
+                </a:r>
+                <a:r>
+                  <a:rPr lang="en-GB" sz="2100" dirty="0">
+                    <a:latin typeface="Aptos" panose="020B0004020202020204" pitchFamily="34" charset="0"/>
+                  </a:rPr>
+                  <a:t>and</a:t>
+                </a:r>
+                <a:r>
+                  <a:rPr lang="en-GB" sz="2000" dirty="0"/>
+                  <a:t> </a:t>
                 </a:r>
                 <a:r>
                   <a:rPr lang="en-GB" sz="2000" i="1" dirty="0"/>
@@ -14771,7 +14888,13 @@
                 </a:r>
                 <a:r>
                   <a:rPr lang="en-GB" sz="2000" dirty="0"/>
-                  <a:t> are the sample size from samples 1 and 2, and</a:t>
+                  <a:t> </a:t>
+                </a:r>
+                <a:r>
+                  <a:rPr lang="en-GB" sz="2100" dirty="0">
+                    <a:latin typeface="Aptos" panose="020B0004020202020204" pitchFamily="34" charset="0"/>
+                  </a:rPr>
+                  <a:t>are the sample size from samples 1 and 2,</a:t>
                 </a:r>
               </a:p>
               <a:p>
@@ -14781,37 +14904,19 @@
                 </a:r>
                 <a:r>
                   <a:rPr lang="en-GB" sz="2000" dirty="0"/>
-                  <a:t> is the test statistic (look-up using the t-distribution based on the sample size) with </a:t>
+                  <a:t> </a:t>
                 </a:r>
                 <a:r>
-                  <a:rPr lang="en-GB" sz="2000" i="1" dirty="0"/>
-                  <a:t>n</a:t>
-                </a:r>
-                <a:r>
-                  <a:rPr lang="en-GB" sz="2000" i="1" baseline="-25000" dirty="0"/>
-                  <a:t>1 </a:t>
-                </a:r>
-                <a:r>
-                  <a:rPr lang="en-GB" sz="2000" dirty="0"/>
-                  <a:t>+</a:t>
-                </a:r>
-                <a:r>
-                  <a:rPr lang="en-GB" sz="2000" i="1" dirty="0"/>
-                  <a:t> n</a:t>
-                </a:r>
-                <a:r>
-                  <a:rPr lang="en-GB" sz="2000" i="1" baseline="-25000" dirty="0"/>
-                  <a:t>2</a:t>
-                </a:r>
-                <a:r>
-                  <a:rPr lang="en-GB" sz="2000" dirty="0"/>
-                  <a:t>-2 degrees of freedom</a:t>
+                  <a:rPr lang="en-GB" sz="2100" dirty="0">
+                    <a:latin typeface="Aptos" panose="020B0004020202020204" pitchFamily="34" charset="0"/>
+                  </a:rPr>
+                  <a:t>is the test statistic (look-up using the t-distribution based on the sample size) with n1+n2-2 degrees of freedom</a:t>
                 </a:r>
               </a:p>
             </p:txBody>
           </p:sp>
         </mc:Choice>
-        <mc:Fallback xmlns="">
+        <mc:Fallback>
           <p:sp>
             <p:nvSpPr>
               <p:cNvPr id="6" name="Segnaposto contenuto 2">
@@ -14837,7 +14942,7 @@
               <a:blipFill>
                 <a:blip r:embed="rId3"/>
                 <a:stretch>
-                  <a:fillRect l="-768" t="-5405"/>
+                  <a:fillRect l="-768" t="-3378" r="-1152" b="-676"/>
                 </a:stretch>
               </a:blipFill>
             </p:spPr>
@@ -15056,9 +15161,7 @@
           </a:p>
           <a:p>
             <a:r>
-              <a:rPr lang="en-GB" dirty="0">
-                <a:latin typeface="Palatino Linotype" panose="02040502050505030304" pitchFamily="18" charset="0"/>
-              </a:rPr>
+              <a:rPr lang="en-GB" dirty="0"/>
               <a:t>The usability of app B is statistically better if we consider a level of significance (p-value) greater than ~ 0.10</a:t>
             </a:r>
           </a:p>
